--- a/plantillas-taller/Plantilla taller · Encuentro 2 · aplicación.pptx
+++ b/plantillas-taller/Plantilla taller · Encuentro 2 · aplicación.pptx
@@ -119,7 +119,7 @@
   <p:extLst>
     <p:ext uri="{521415D9-36F7-43E2-AB2F-B90AF26B5E84}">
       <p14:sectionLst xmlns:p14="http://schemas.microsoft.com/office/powerpoint/2010/main">
-        <p14:section name="Encuentro 2" id="{f74edfae-f05a-9aff-16df-161b0f92f937}">
+        <p14:section name="Encuentro 2" id="{65b47b1c-991d-0084-0060-4ab99a5999f4}">
           <p14:sldIdLst>
             <p14:sldId id="256"/>
             <p14:sldId id="257"/>
@@ -3368,8 +3368,8 @@
         </p:nvSpPr>
         <p:spPr>
           <a:xfrm>
-            <a:off x="1143000" y="4434840"/>
-            <a:ext cx="4069080" cy="502920"/>
+            <a:off x="1145286" y="4434840"/>
+            <a:ext cx="4066794" cy="502920"/>
           </a:xfrm>
           <a:prstGeom prst="rect">
             <a:avLst/>
@@ -7120,8 +7120,8 @@
         </p:nvSpPr>
         <p:spPr>
           <a:xfrm>
-            <a:off x="7223760" y="1600200"/>
-            <a:ext cx="3977640" cy="457200"/>
+            <a:off x="7200900" y="1600200"/>
+            <a:ext cx="4000500" cy="457200"/>
           </a:xfrm>
           <a:prstGeom prst="rect">
             <a:avLst/>
@@ -12558,8 +12558,8 @@
         </p:nvSpPr>
         <p:spPr>
           <a:xfrm>
-            <a:off x="1143000" y="1280160"/>
-            <a:ext cx="7086600" cy="457200"/>
+            <a:off x="1120140" y="1280160"/>
+            <a:ext cx="7109460" cy="457200"/>
           </a:xfrm>
           <a:prstGeom prst="rect">
             <a:avLst/>
@@ -14647,8 +14647,8 @@
         </p:nvSpPr>
         <p:spPr>
           <a:xfrm>
-            <a:off x="8823960" y="1691640"/>
-            <a:ext cx="2453335" cy="457200"/>
+            <a:off x="8801100" y="1691640"/>
+            <a:ext cx="2476195" cy="457200"/>
           </a:xfrm>
           <a:prstGeom prst="rect">
             <a:avLst/>
